--- a/PPT정리/18. 퀵 스타터 셋팅.pptx
+++ b/PPT정리/18. 퀵 스타터 셋팅.pptx
@@ -10,6 +10,7 @@
     <p:sldId id="259" r:id="rId4"/>
     <p:sldId id="261" r:id="rId5"/>
     <p:sldId id="260" r:id="rId6"/>
+    <p:sldId id="262" r:id="rId7"/>
   </p:sldIdLst>
   <p:sldSz cx="12192000" cy="6858000"/>
   <p:notesSz cx="6858000" cy="9144000"/>
@@ -108,6 +109,30 @@
       </a:defRPr>
     </a:lvl9pPr>
   </p:defaultTextStyle>
+  <p:extLst>
+    <p:ext uri="{521415D9-36F7-43E2-AB2F-B90AF26B5E84}">
+      <p14:sectionLst xmlns:p14="http://schemas.microsoft.com/office/powerpoint/2010/main">
+        <p14:section name="기본 구역" id="{B0CA567E-D730-432B-81FD-4B98DE2F4581}">
+          <p14:sldIdLst>
+            <p14:sldId id="258"/>
+          </p14:sldIdLst>
+        </p14:section>
+        <p14:section name="기반 지식이 없는 사용자" id="{B4A7727C-AFDB-45FB-9B8E-A79937E291E1}">
+          <p14:sldIdLst>
+            <p14:sldId id="257"/>
+            <p14:sldId id="259"/>
+            <p14:sldId id="261"/>
+            <p14:sldId id="260"/>
+          </p14:sldIdLst>
+        </p14:section>
+        <p14:section name="일반적인 개발자 프로젝트 생성방법" id="{19261CF7-C0B1-4A77-9C0B-E274728146D5}">
+          <p14:sldIdLst>
+            <p14:sldId id="262"/>
+          </p14:sldIdLst>
+        </p14:section>
+      </p14:sectionLst>
+    </p:ext>
+  </p:extLst>
 </p:presentation>
 </file>
 
@@ -4934,6 +4959,253 @@
 </p:sld>
 </file>
 
+<file path=ppt/slides/slide6.xml><?xml version="1.0" encoding="utf-8"?>
+<p:sld xmlns:a="http://schemas.openxmlformats.org/drawingml/2006/main" xmlns:r="http://schemas.openxmlformats.org/officeDocument/2006/relationships" xmlns:p="http://schemas.openxmlformats.org/presentationml/2006/main">
+  <p:cSld>
+    <p:spTree>
+      <p:nvGrpSpPr>
+        <p:cNvPr id="1" name=""/>
+        <p:cNvGrpSpPr/>
+        <p:nvPr/>
+      </p:nvGrpSpPr>
+      <p:grpSpPr>
+        <a:xfrm>
+          <a:off x="0" y="0"/>
+          <a:ext cx="0" cy="0"/>
+          <a:chOff x="0" y="0"/>
+          <a:chExt cx="0" cy="0"/>
+        </a:xfrm>
+      </p:grpSpPr>
+      <p:sp>
+        <p:nvSpPr>
+          <p:cNvPr id="2" name="제목 1">
+            <a:extLst>
+              <a:ext uri="{FF2B5EF4-FFF2-40B4-BE49-F238E27FC236}">
+                <a16:creationId xmlns:a16="http://schemas.microsoft.com/office/drawing/2014/main" id="{41C0A288-C55A-F598-013F-70A08E409BB8}"/>
+              </a:ext>
+            </a:extLst>
+          </p:cNvPr>
+          <p:cNvSpPr>
+            <a:spLocks noGrp="1"/>
+          </p:cNvSpPr>
+          <p:nvPr>
+            <p:ph type="title"/>
+          </p:nvPr>
+        </p:nvSpPr>
+        <p:spPr/>
+        <p:txBody>
+          <a:bodyPr/>
+          <a:lstStyle/>
+          <a:p>
+            <a:r>
+              <a:rPr lang="en-US" altLang="ko-KR" dirty="0"/>
+              <a:t>/</a:t>
+            </a:r>
+            <a:r>
+              <a:rPr lang="en-US" altLang="ko-KR" dirty="0" err="1"/>
+              <a:t>init</a:t>
+            </a:r>
+            <a:r>
+              <a:rPr lang="en-US" altLang="ko-KR" dirty="0"/>
+              <a:t> </a:t>
+            </a:r>
+            <a:r>
+              <a:rPr lang="ko-KR" altLang="en-US" dirty="0"/>
+              <a:t>명령 사용</a:t>
+            </a:r>
+          </a:p>
+        </p:txBody>
+      </p:sp>
+      <p:sp>
+        <p:nvSpPr>
+          <p:cNvPr id="3" name="TextBox 2">
+            <a:extLst>
+              <a:ext uri="{FF2B5EF4-FFF2-40B4-BE49-F238E27FC236}">
+                <a16:creationId xmlns:a16="http://schemas.microsoft.com/office/drawing/2014/main" id="{DB139F96-0620-D25B-EBA7-68D804836537}"/>
+              </a:ext>
+            </a:extLst>
+          </p:cNvPr>
+          <p:cNvSpPr txBox="1"/>
+          <p:nvPr/>
+        </p:nvSpPr>
+        <p:spPr>
+          <a:xfrm>
+            <a:off x="1187777" y="1847654"/>
+            <a:ext cx="9967903" cy="1600438"/>
+          </a:xfrm>
+          <a:prstGeom prst="rect">
+            <a:avLst/>
+          </a:prstGeom>
+          <a:noFill/>
+        </p:spPr>
+        <p:txBody>
+          <a:bodyPr wrap="square" rtlCol="0">
+            <a:spAutoFit/>
+          </a:bodyPr>
+          <a:lstStyle/>
+          <a:p>
+            <a:r>
+              <a:rPr lang="ko-KR" altLang="en-US" sz="1400" dirty="0"/>
+              <a:t>개발자라면 주요 기술 스택</a:t>
+            </a:r>
+            <a:r>
+              <a:rPr lang="en-US" altLang="ko-KR" sz="1400" dirty="0"/>
+              <a:t> </a:t>
+            </a:r>
+            <a:r>
+              <a:rPr lang="ko-KR" altLang="en-US" sz="1400" dirty="0"/>
+              <a:t>정의하고 </a:t>
+            </a:r>
+            <a:r>
+              <a:rPr lang="en-US" altLang="ko-KR" sz="1400" dirty="0"/>
+              <a:t>/</a:t>
+            </a:r>
+            <a:r>
+              <a:rPr lang="en-US" altLang="ko-KR" sz="1400" dirty="0" err="1"/>
+              <a:t>init</a:t>
+            </a:r>
+            <a:r>
+              <a:rPr lang="en-US" altLang="ko-KR" sz="1400" dirty="0"/>
+              <a:t> </a:t>
+            </a:r>
+            <a:r>
+              <a:rPr lang="ko-KR" altLang="en-US" sz="1400" dirty="0"/>
+              <a:t>명령을 통해 프로젝트 전체를 스캔 및 분석을 해서 현재상황을 완벽하게 이해한 다음</a:t>
+            </a:r>
+            <a:r>
+              <a:rPr lang="en-US" altLang="ko-KR" sz="1400" dirty="0"/>
+              <a:t>\</a:t>
+            </a:r>
+          </a:p>
+          <a:p>
+            <a:r>
+              <a:rPr lang="ko-KR" altLang="en-US" sz="1400" dirty="0"/>
+              <a:t>그 맥락을 바탕으로 </a:t>
+            </a:r>
+            <a:r>
+              <a:rPr lang="en-US" altLang="ko-KR" sz="1400" dirty="0"/>
+              <a:t>CLUADE.md </a:t>
+            </a:r>
+            <a:r>
+              <a:rPr lang="ko-KR" altLang="en-US" sz="1400" dirty="0"/>
+              <a:t>파일을 생성하게 됨</a:t>
+            </a:r>
+            <a:r>
+              <a:rPr lang="en-US" altLang="ko-KR" sz="1400" dirty="0"/>
+              <a:t>. </a:t>
+            </a:r>
+            <a:br>
+              <a:rPr lang="en-US" altLang="ko-KR" sz="1400" dirty="0"/>
+            </a:br>
+            <a:endParaRPr lang="en-US" altLang="ko-KR" sz="1400" dirty="0"/>
+          </a:p>
+          <a:p>
+            <a:r>
+              <a:rPr lang="en-US" altLang="ko-KR" sz="1400" dirty="0"/>
+              <a:t>CLAUDE.md </a:t>
+            </a:r>
+            <a:r>
+              <a:rPr lang="ko-KR" altLang="en-US" sz="1400" dirty="0"/>
+              <a:t>파일을 통해 앞으로의 모든 수정 작업에서의 프로젝트 구조</a:t>
+            </a:r>
+            <a:r>
+              <a:rPr lang="en-US" altLang="ko-KR" sz="1400" dirty="0"/>
+              <a:t>, </a:t>
+            </a:r>
+            <a:r>
+              <a:rPr lang="ko-KR" altLang="en-US" sz="1400" dirty="0"/>
+              <a:t>기술 스택</a:t>
+            </a:r>
+            <a:r>
+              <a:rPr lang="en-US" altLang="ko-KR" sz="1400" dirty="0"/>
+              <a:t>, </a:t>
+            </a:r>
+            <a:r>
+              <a:rPr lang="ko-KR" altLang="en-US" sz="1400" dirty="0"/>
+              <a:t>코드 컨벤션을 일관성 있게 작성할 수 있게 해준다</a:t>
+            </a:r>
+            <a:r>
+              <a:rPr lang="en-US" altLang="ko-KR" sz="1400" dirty="0"/>
+              <a:t>.</a:t>
+            </a:r>
+          </a:p>
+          <a:p>
+            <a:endParaRPr lang="en-US" altLang="ko-KR" sz="1400" dirty="0"/>
+          </a:p>
+          <a:p>
+            <a:r>
+              <a:rPr lang="ko-KR" altLang="en-US" sz="1400" dirty="0"/>
+              <a:t>요약 </a:t>
+            </a:r>
+            <a:r>
+              <a:rPr lang="en-US" altLang="ko-KR" sz="1400" dirty="0"/>
+              <a:t>: </a:t>
+            </a:r>
+            <a:r>
+              <a:rPr lang="ko-KR" altLang="en-US" sz="1400" b="1" dirty="0"/>
+              <a:t>주요 </a:t>
+            </a:r>
+            <a:r>
+              <a:rPr lang="ko-KR" altLang="en-US" sz="1400" b="1" dirty="0" err="1"/>
+              <a:t>기술스택</a:t>
+            </a:r>
+            <a:r>
+              <a:rPr lang="ko-KR" altLang="en-US" sz="1400" b="1" dirty="0"/>
+              <a:t> </a:t>
+            </a:r>
+            <a:r>
+              <a:rPr lang="ko-KR" altLang="en-US" sz="1400" b="1" dirty="0" err="1"/>
+              <a:t>정리후</a:t>
+            </a:r>
+            <a:r>
+              <a:rPr lang="ko-KR" altLang="en-US" sz="1400" b="1" dirty="0"/>
+              <a:t> </a:t>
+            </a:r>
+            <a:r>
+              <a:rPr lang="en-US" altLang="ko-KR" sz="1400" b="1" dirty="0"/>
+              <a:t>/</a:t>
+            </a:r>
+            <a:r>
+              <a:rPr lang="en-US" altLang="ko-KR" sz="1400" b="1" dirty="0" err="1"/>
+              <a:t>init</a:t>
+            </a:r>
+            <a:r>
+              <a:rPr lang="en-US" altLang="ko-KR" sz="1400" b="1" dirty="0"/>
+              <a:t> </a:t>
+            </a:r>
+            <a:r>
+              <a:rPr lang="ko-KR" altLang="en-US" sz="1400" b="1" dirty="0"/>
+              <a:t>명령을 통해 프로젝트를 초기화 </a:t>
+            </a:r>
+            <a:r>
+              <a:rPr lang="ko-KR" altLang="en-US" sz="1400" b="1" dirty="0" err="1"/>
+              <a:t>하는걸</a:t>
+            </a:r>
+            <a:r>
+              <a:rPr lang="ko-KR" altLang="en-US" sz="1400" b="1" dirty="0"/>
+              <a:t> 권장한다</a:t>
+            </a:r>
+            <a:r>
+              <a:rPr lang="en-US" altLang="ko-KR" sz="1400" b="1" dirty="0"/>
+              <a:t>.</a:t>
+            </a:r>
+            <a:endParaRPr lang="ko-KR" altLang="en-US" sz="1400" b="1" dirty="0"/>
+          </a:p>
+        </p:txBody>
+      </p:sp>
+    </p:spTree>
+    <p:extLst>
+      <p:ext uri="{BB962C8B-B14F-4D97-AF65-F5344CB8AC3E}">
+        <p14:creationId xmlns:p14="http://schemas.microsoft.com/office/powerpoint/2010/main" val="4042486729"/>
+      </p:ext>
+    </p:extLst>
+  </p:cSld>
+  <p:clrMapOvr>
+    <a:masterClrMapping/>
+  </p:clrMapOvr>
+</p:sld>
+</file>
+
 <file path=ppt/theme/theme1.xml><?xml version="1.0" encoding="utf-8"?>
 <a:theme xmlns:a="http://schemas.openxmlformats.org/drawingml/2006/main" name="추억">
   <a:themeElements>
